--- a/deliverables/decks/SENTINEL-CXR_Final.pptx
+++ b/deliverables/decks/SENTINEL-CXR_Final.pptx
@@ -5847,21 +5847,777 @@
                 </a:solidFill>
                 <a:latin typeface="Calibri"/>
               </a:rPr>
-              <a:t>What we audited — and what we cannot.</a:t>
-            </a:r>
-          </a:p>
-        </p:txBody>
-      </p:sp>
-      <p:sp>
-        <p:nvSpPr>
-          <p:cNvPr id="6" name="Rounded Rectangle 5"/>
+              <a:t>The audit fails. We predicted why before we measured.</a:t>
+            </a:r>
+          </a:p>
+        </p:txBody>
+      </p:sp>
+      <p:sp>
+        <p:nvSpPr>
+          <p:cNvPr id="6" name="TextBox 5"/>
+          <p:cNvSpPr txBox="1"/>
+          <p:nvPr/>
+        </p:nvSpPr>
+        <p:spPr>
+          <a:xfrm>
+            <a:off x="640080" y="2240280"/>
+            <a:ext cx="3840480" cy="457200"/>
+          </a:xfrm>
+          <a:prstGeom prst="rect">
+            <a:avLst/>
+          </a:prstGeom>
+          <a:noFill/>
+        </p:spPr>
+        <p:txBody>
+          <a:bodyPr wrap="square" anchor="t">
+            <a:spAutoFit/>
+          </a:bodyPr>
+          <a:lstStyle/>
+          <a:p>
+            <a:pPr algn="l">
+              <a:lnSpc>
+                <a:spcPct val="100000"/>
+              </a:lnSpc>
+            </a:pPr>
+            <a:r>
+              <a:rPr sz="1300" b="1" i="0">
+                <a:solidFill>
+                  <a:srgbClr val="2E9CB8"/>
+                </a:solidFill>
+                <a:latin typeface="Consolas"/>
+              </a:rPr>
+              <a:t>Stratum</a:t>
+            </a:r>
+          </a:p>
+        </p:txBody>
+      </p:sp>
+      <p:sp>
+        <p:nvSpPr>
+          <p:cNvPr id="7" name="TextBox 6"/>
+          <p:cNvSpPr txBox="1"/>
+          <p:nvPr/>
+        </p:nvSpPr>
+        <p:spPr>
+          <a:xfrm>
+            <a:off x="4480560" y="2240280"/>
+            <a:ext cx="2377440" cy="457200"/>
+          </a:xfrm>
+          <a:prstGeom prst="rect">
+            <a:avLst/>
+          </a:prstGeom>
+          <a:noFill/>
+        </p:spPr>
+        <p:txBody>
+          <a:bodyPr wrap="square" anchor="t">
+            <a:spAutoFit/>
+          </a:bodyPr>
+          <a:lstStyle/>
+          <a:p>
+            <a:pPr algn="l">
+              <a:lnSpc>
+                <a:spcPct val="100000"/>
+              </a:lnSpc>
+            </a:pPr>
+            <a:r>
+              <a:rPr sz="1300" b="1" i="0">
+                <a:solidFill>
+                  <a:srgbClr val="2E9CB8"/>
+                </a:solidFill>
+                <a:latin typeface="Consolas"/>
+              </a:rPr>
+              <a:t>TPR gap</a:t>
+            </a:r>
+          </a:p>
+        </p:txBody>
+      </p:sp>
+      <p:sp>
+        <p:nvSpPr>
+          <p:cNvPr id="8" name="TextBox 7"/>
+          <p:cNvSpPr txBox="1"/>
+          <p:nvPr/>
+        </p:nvSpPr>
+        <p:spPr>
+          <a:xfrm>
+            <a:off x="6858000" y="2240280"/>
+            <a:ext cx="2377440" cy="457200"/>
+          </a:xfrm>
+          <a:prstGeom prst="rect">
+            <a:avLst/>
+          </a:prstGeom>
+          <a:noFill/>
+        </p:spPr>
+        <p:txBody>
+          <a:bodyPr wrap="square" anchor="t">
+            <a:spAutoFit/>
+          </a:bodyPr>
+          <a:lstStyle/>
+          <a:p>
+            <a:pPr algn="l">
+              <a:lnSpc>
+                <a:spcPct val="100000"/>
+              </a:lnSpc>
+            </a:pPr>
+            <a:r>
+              <a:rPr sz="1300" b="1" i="0">
+                <a:solidFill>
+                  <a:srgbClr val="2E9CB8"/>
+                </a:solidFill>
+                <a:latin typeface="Consolas"/>
+              </a:rPr>
+              <a:t>FPR gap</a:t>
+            </a:r>
+          </a:p>
+        </p:txBody>
+      </p:sp>
+      <p:sp>
+        <p:nvSpPr>
+          <p:cNvPr id="9" name="TextBox 8"/>
+          <p:cNvSpPr txBox="1"/>
+          <p:nvPr/>
+        </p:nvSpPr>
+        <p:spPr>
+          <a:xfrm>
+            <a:off x="9235440" y="2240280"/>
+            <a:ext cx="2286000" cy="457200"/>
+          </a:xfrm>
+          <a:prstGeom prst="rect">
+            <a:avLst/>
+          </a:prstGeom>
+          <a:noFill/>
+        </p:spPr>
+        <p:txBody>
+          <a:bodyPr wrap="square" anchor="t">
+            <a:spAutoFit/>
+          </a:bodyPr>
+          <a:lstStyle/>
+          <a:p>
+            <a:pPr algn="l">
+              <a:lnSpc>
+                <a:spcPct val="100000"/>
+              </a:lnSpc>
+            </a:pPr>
+            <a:r>
+              <a:rPr sz="1300" b="1" i="0">
+                <a:solidFill>
+                  <a:srgbClr val="2E9CB8"/>
+                </a:solidFill>
+                <a:latin typeface="Consolas"/>
+              </a:rPr>
+              <a:t>Within 0.10?</a:t>
+            </a:r>
+          </a:p>
+        </p:txBody>
+      </p:sp>
+      <p:sp>
+        <p:nvSpPr>
+          <p:cNvPr id="10" name="Rectangle 9"/>
           <p:cNvSpPr/>
           <p:nvPr/>
         </p:nvSpPr>
         <p:spPr>
           <a:xfrm>
-            <a:off x="640080" y="2286000"/>
-            <a:ext cx="3493008" cy="2011680"/>
+            <a:off x="640080" y="2679192"/>
+            <a:ext cx="10881360" cy="12700"/>
+          </a:xfrm>
+          <a:prstGeom prst="rect">
+            <a:avLst/>
+          </a:prstGeom>
+          <a:solidFill>
+            <a:srgbClr val="2E9CB8"/>
+          </a:solidFill>
+          <a:ln>
+            <a:noFill/>
+          </a:ln>
+          <a:effectLst/>
+        </p:spPr>
+        <p:style>
+          <a:lnRef idx="1">
+            <a:schemeClr val="accent1"/>
+          </a:lnRef>
+          <a:fillRef idx="3">
+            <a:schemeClr val="accent1"/>
+          </a:fillRef>
+          <a:effectRef idx="2">
+            <a:schemeClr val="accent1"/>
+          </a:effectRef>
+          <a:fontRef idx="minor">
+            <a:schemeClr val="lt1"/>
+          </a:fontRef>
+        </p:style>
+        <p:txBody>
+          <a:bodyPr rtlCol="0" anchor="ctr"/>
+          <a:lstStyle/>
+          <a:p>
+            <a:pPr algn="ctr"/>
+          </a:p>
+        </p:txBody>
+      </p:sp>
+      <p:sp>
+        <p:nvSpPr>
+          <p:cNvPr id="11" name="TextBox 10"/>
+          <p:cNvSpPr txBox="1"/>
+          <p:nvPr/>
+        </p:nvSpPr>
+        <p:spPr>
+          <a:xfrm>
+            <a:off x="640080" y="2752344"/>
+            <a:ext cx="3840480" cy="457200"/>
+          </a:xfrm>
+          <a:prstGeom prst="rect">
+            <a:avLst/>
+          </a:prstGeom>
+          <a:noFill/>
+        </p:spPr>
+        <p:txBody>
+          <a:bodyPr wrap="square" anchor="t">
+            <a:spAutoFit/>
+          </a:bodyPr>
+          <a:lstStyle/>
+          <a:p>
+            <a:pPr algn="l">
+              <a:lnSpc>
+                <a:spcPct val="100000"/>
+              </a:lnSpc>
+            </a:pPr>
+            <a:r>
+              <a:rPr sz="1400" b="0" i="0">
+                <a:solidFill>
+                  <a:srgbClr val="8A9299"/>
+                </a:solidFill>
+                <a:latin typeface="Calibri"/>
+              </a:rPr>
+              <a:t>Patient sex</a:t>
+            </a:r>
+          </a:p>
+        </p:txBody>
+      </p:sp>
+      <p:sp>
+        <p:nvSpPr>
+          <p:cNvPr id="12" name="TextBox 11"/>
+          <p:cNvSpPr txBox="1"/>
+          <p:nvPr/>
+        </p:nvSpPr>
+        <p:spPr>
+          <a:xfrm>
+            <a:off x="4480560" y="2752344"/>
+            <a:ext cx="2377440" cy="457200"/>
+          </a:xfrm>
+          <a:prstGeom prst="rect">
+            <a:avLst/>
+          </a:prstGeom>
+          <a:noFill/>
+        </p:spPr>
+        <p:txBody>
+          <a:bodyPr wrap="square" anchor="t">
+            <a:spAutoFit/>
+          </a:bodyPr>
+          <a:lstStyle/>
+          <a:p>
+            <a:pPr algn="l">
+              <a:lnSpc>
+                <a:spcPct val="100000"/>
+              </a:lnSpc>
+            </a:pPr>
+            <a:r>
+              <a:rPr sz="1400" b="0" i="0">
+                <a:solidFill>
+                  <a:srgbClr val="8A9299"/>
+                </a:solidFill>
+                <a:latin typeface="Consolas"/>
+              </a:rPr>
+              <a:t>0.0165</a:t>
+            </a:r>
+          </a:p>
+        </p:txBody>
+      </p:sp>
+      <p:sp>
+        <p:nvSpPr>
+          <p:cNvPr id="13" name="TextBox 12"/>
+          <p:cNvSpPr txBox="1"/>
+          <p:nvPr/>
+        </p:nvSpPr>
+        <p:spPr>
+          <a:xfrm>
+            <a:off x="6858000" y="2752344"/>
+            <a:ext cx="2377440" cy="457200"/>
+          </a:xfrm>
+          <a:prstGeom prst="rect">
+            <a:avLst/>
+          </a:prstGeom>
+          <a:noFill/>
+        </p:spPr>
+        <p:txBody>
+          <a:bodyPr wrap="square" anchor="t">
+            <a:spAutoFit/>
+          </a:bodyPr>
+          <a:lstStyle/>
+          <a:p>
+            <a:pPr algn="l">
+              <a:lnSpc>
+                <a:spcPct val="100000"/>
+              </a:lnSpc>
+            </a:pPr>
+            <a:r>
+              <a:rPr sz="1400" b="0" i="0">
+                <a:solidFill>
+                  <a:srgbClr val="8A9299"/>
+                </a:solidFill>
+                <a:latin typeface="Consolas"/>
+              </a:rPr>
+              <a:t>0.0267</a:t>
+            </a:r>
+          </a:p>
+        </p:txBody>
+      </p:sp>
+      <p:sp>
+        <p:nvSpPr>
+          <p:cNvPr id="14" name="TextBox 13"/>
+          <p:cNvSpPr txBox="1"/>
+          <p:nvPr/>
+        </p:nvSpPr>
+        <p:spPr>
+          <a:xfrm>
+            <a:off x="9235440" y="2752344"/>
+            <a:ext cx="2286000" cy="457200"/>
+          </a:xfrm>
+          <a:prstGeom prst="rect">
+            <a:avLst/>
+          </a:prstGeom>
+          <a:noFill/>
+        </p:spPr>
+        <p:txBody>
+          <a:bodyPr wrap="square" anchor="t">
+            <a:spAutoFit/>
+          </a:bodyPr>
+          <a:lstStyle/>
+          <a:p>
+            <a:pPr algn="l">
+              <a:lnSpc>
+                <a:spcPct val="100000"/>
+              </a:lnSpc>
+            </a:pPr>
+            <a:r>
+              <a:rPr sz="1400" b="0" i="0">
+                <a:solidFill>
+                  <a:srgbClr val="8A9299"/>
+                </a:solidFill>
+                <a:latin typeface="Consolas"/>
+              </a:rPr>
+              <a:t>yes</a:t>
+            </a:r>
+          </a:p>
+        </p:txBody>
+      </p:sp>
+      <p:sp>
+        <p:nvSpPr>
+          <p:cNvPr id="15" name="Rectangle 14"/>
+          <p:cNvSpPr/>
+          <p:nvPr/>
+        </p:nvSpPr>
+        <p:spPr>
+          <a:xfrm>
+            <a:off x="640080" y="3172968"/>
+            <a:ext cx="10881360" cy="6350"/>
+          </a:xfrm>
+          <a:prstGeom prst="rect">
+            <a:avLst/>
+          </a:prstGeom>
+          <a:solidFill>
+            <a:srgbClr val="2A2F33"/>
+          </a:solidFill>
+          <a:ln>
+            <a:noFill/>
+          </a:ln>
+          <a:effectLst/>
+        </p:spPr>
+        <p:style>
+          <a:lnRef idx="1">
+            <a:schemeClr val="accent1"/>
+          </a:lnRef>
+          <a:fillRef idx="3">
+            <a:schemeClr val="accent1"/>
+          </a:fillRef>
+          <a:effectRef idx="2">
+            <a:schemeClr val="accent1"/>
+          </a:effectRef>
+          <a:fontRef idx="minor">
+            <a:schemeClr val="lt1"/>
+          </a:fontRef>
+        </p:style>
+        <p:txBody>
+          <a:bodyPr rtlCol="0" anchor="ctr"/>
+          <a:lstStyle/>
+          <a:p>
+            <a:pPr algn="ctr"/>
+          </a:p>
+        </p:txBody>
+      </p:sp>
+      <p:sp>
+        <p:nvSpPr>
+          <p:cNvPr id="16" name="TextBox 15"/>
+          <p:cNvSpPr txBox="1"/>
+          <p:nvPr/>
+        </p:nvSpPr>
+        <p:spPr>
+          <a:xfrm>
+            <a:off x="640080" y="3209544"/>
+            <a:ext cx="3840480" cy="457200"/>
+          </a:xfrm>
+          <a:prstGeom prst="rect">
+            <a:avLst/>
+          </a:prstGeom>
+          <a:noFill/>
+        </p:spPr>
+        <p:txBody>
+          <a:bodyPr wrap="square" anchor="t">
+            <a:spAutoFit/>
+          </a:bodyPr>
+          <a:lstStyle/>
+          <a:p>
+            <a:pPr algn="l">
+              <a:lnSpc>
+                <a:spcPct val="100000"/>
+              </a:lnSpc>
+            </a:pPr>
+            <a:r>
+              <a:rPr sz="1400" b="0" i="0">
+                <a:solidFill>
+                  <a:srgbClr val="8A9299"/>
+                </a:solidFill>
+                <a:latin typeface="Calibri"/>
+              </a:rPr>
+              <a:t>Age band</a:t>
+            </a:r>
+          </a:p>
+        </p:txBody>
+      </p:sp>
+      <p:sp>
+        <p:nvSpPr>
+          <p:cNvPr id="17" name="TextBox 16"/>
+          <p:cNvSpPr txBox="1"/>
+          <p:nvPr/>
+        </p:nvSpPr>
+        <p:spPr>
+          <a:xfrm>
+            <a:off x="4480560" y="3209544"/>
+            <a:ext cx="2377440" cy="457200"/>
+          </a:xfrm>
+          <a:prstGeom prst="rect">
+            <a:avLst/>
+          </a:prstGeom>
+          <a:noFill/>
+        </p:spPr>
+        <p:txBody>
+          <a:bodyPr wrap="square" anchor="t">
+            <a:spAutoFit/>
+          </a:bodyPr>
+          <a:lstStyle/>
+          <a:p>
+            <a:pPr algn="l">
+              <a:lnSpc>
+                <a:spcPct val="100000"/>
+              </a:lnSpc>
+            </a:pPr>
+            <a:r>
+              <a:rPr sz="1400" b="0" i="0">
+                <a:solidFill>
+                  <a:srgbClr val="8A9299"/>
+                </a:solidFill>
+                <a:latin typeface="Consolas"/>
+              </a:rPr>
+              <a:t>0.1295</a:t>
+            </a:r>
+          </a:p>
+        </p:txBody>
+      </p:sp>
+      <p:sp>
+        <p:nvSpPr>
+          <p:cNvPr id="18" name="TextBox 17"/>
+          <p:cNvSpPr txBox="1"/>
+          <p:nvPr/>
+        </p:nvSpPr>
+        <p:spPr>
+          <a:xfrm>
+            <a:off x="6858000" y="3209544"/>
+            <a:ext cx="2377440" cy="457200"/>
+          </a:xfrm>
+          <a:prstGeom prst="rect">
+            <a:avLst/>
+          </a:prstGeom>
+          <a:noFill/>
+        </p:spPr>
+        <p:txBody>
+          <a:bodyPr wrap="square" anchor="t">
+            <a:spAutoFit/>
+          </a:bodyPr>
+          <a:lstStyle/>
+          <a:p>
+            <a:pPr algn="l">
+              <a:lnSpc>
+                <a:spcPct val="100000"/>
+              </a:lnSpc>
+            </a:pPr>
+            <a:r>
+              <a:rPr sz="1400" b="0" i="0">
+                <a:solidFill>
+                  <a:srgbClr val="8A9299"/>
+                </a:solidFill>
+                <a:latin typeface="Consolas"/>
+              </a:rPr>
+              <a:t>0.2040</a:t>
+            </a:r>
+          </a:p>
+        </p:txBody>
+      </p:sp>
+      <p:sp>
+        <p:nvSpPr>
+          <p:cNvPr id="19" name="TextBox 18"/>
+          <p:cNvSpPr txBox="1"/>
+          <p:nvPr/>
+        </p:nvSpPr>
+        <p:spPr>
+          <a:xfrm>
+            <a:off x="9235440" y="3209544"/>
+            <a:ext cx="2286000" cy="457200"/>
+          </a:xfrm>
+          <a:prstGeom prst="rect">
+            <a:avLst/>
+          </a:prstGeom>
+          <a:noFill/>
+        </p:spPr>
+        <p:txBody>
+          <a:bodyPr wrap="square" anchor="t">
+            <a:spAutoFit/>
+          </a:bodyPr>
+          <a:lstStyle/>
+          <a:p>
+            <a:pPr algn="l">
+              <a:lnSpc>
+                <a:spcPct val="100000"/>
+              </a:lnSpc>
+            </a:pPr>
+            <a:r>
+              <a:rPr sz="1400" b="0" i="0">
+                <a:solidFill>
+                  <a:srgbClr val="8A9299"/>
+                </a:solidFill>
+                <a:latin typeface="Consolas"/>
+              </a:rPr>
+              <a:t>NO</a:t>
+            </a:r>
+          </a:p>
+        </p:txBody>
+      </p:sp>
+      <p:sp>
+        <p:nvSpPr>
+          <p:cNvPr id="20" name="Rectangle 19"/>
+          <p:cNvSpPr/>
+          <p:nvPr/>
+        </p:nvSpPr>
+        <p:spPr>
+          <a:xfrm>
+            <a:off x="640080" y="3630168"/>
+            <a:ext cx="10881360" cy="6350"/>
+          </a:xfrm>
+          <a:prstGeom prst="rect">
+            <a:avLst/>
+          </a:prstGeom>
+          <a:solidFill>
+            <a:srgbClr val="2A2F33"/>
+          </a:solidFill>
+          <a:ln>
+            <a:noFill/>
+          </a:ln>
+          <a:effectLst/>
+        </p:spPr>
+        <p:style>
+          <a:lnRef idx="1">
+            <a:schemeClr val="accent1"/>
+          </a:lnRef>
+          <a:fillRef idx="3">
+            <a:schemeClr val="accent1"/>
+          </a:fillRef>
+          <a:effectRef idx="2">
+            <a:schemeClr val="accent1"/>
+          </a:effectRef>
+          <a:fontRef idx="minor">
+            <a:schemeClr val="lt1"/>
+          </a:fontRef>
+        </p:style>
+        <p:txBody>
+          <a:bodyPr rtlCol="0" anchor="ctr"/>
+          <a:lstStyle/>
+          <a:p>
+            <a:pPr algn="ctr"/>
+          </a:p>
+        </p:txBody>
+      </p:sp>
+      <p:sp>
+        <p:nvSpPr>
+          <p:cNvPr id="21" name="TextBox 20"/>
+          <p:cNvSpPr txBox="1"/>
+          <p:nvPr/>
+        </p:nvSpPr>
+        <p:spPr>
+          <a:xfrm>
+            <a:off x="640080" y="3666744"/>
+            <a:ext cx="3840480" cy="457200"/>
+          </a:xfrm>
+          <a:prstGeom prst="rect">
+            <a:avLst/>
+          </a:prstGeom>
+          <a:noFill/>
+        </p:spPr>
+        <p:txBody>
+          <a:bodyPr wrap="square" anchor="t">
+            <a:spAutoFit/>
+          </a:bodyPr>
+          <a:lstStyle/>
+          <a:p>
+            <a:pPr algn="l">
+              <a:lnSpc>
+                <a:spcPct val="100000"/>
+              </a:lnSpc>
+            </a:pPr>
+            <a:r>
+              <a:rPr sz="1400" b="1" i="0">
+                <a:solidFill>
+                  <a:srgbClr val="E8ECEF"/>
+                </a:solidFill>
+                <a:latin typeface="Calibri"/>
+              </a:rPr>
+              <a:t>View position</a:t>
+            </a:r>
+          </a:p>
+        </p:txBody>
+      </p:sp>
+      <p:sp>
+        <p:nvSpPr>
+          <p:cNvPr id="22" name="TextBox 21"/>
+          <p:cNvSpPr txBox="1"/>
+          <p:nvPr/>
+        </p:nvSpPr>
+        <p:spPr>
+          <a:xfrm>
+            <a:off x="4480560" y="3666744"/>
+            <a:ext cx="2377440" cy="457200"/>
+          </a:xfrm>
+          <a:prstGeom prst="rect">
+            <a:avLst/>
+          </a:prstGeom>
+          <a:noFill/>
+        </p:spPr>
+        <p:txBody>
+          <a:bodyPr wrap="square" anchor="t">
+            <a:spAutoFit/>
+          </a:bodyPr>
+          <a:lstStyle/>
+          <a:p>
+            <a:pPr algn="l">
+              <a:lnSpc>
+                <a:spcPct val="100000"/>
+              </a:lnSpc>
+            </a:pPr>
+            <a:r>
+              <a:rPr sz="1400" b="1" i="0">
+                <a:solidFill>
+                  <a:srgbClr val="E8ECEF"/>
+                </a:solidFill>
+                <a:latin typeface="Consolas"/>
+              </a:rPr>
+              <a:t>0.0228</a:t>
+            </a:r>
+          </a:p>
+        </p:txBody>
+      </p:sp>
+      <p:sp>
+        <p:nvSpPr>
+          <p:cNvPr id="23" name="TextBox 22"/>
+          <p:cNvSpPr txBox="1"/>
+          <p:nvPr/>
+        </p:nvSpPr>
+        <p:spPr>
+          <a:xfrm>
+            <a:off x="6858000" y="3666744"/>
+            <a:ext cx="2377440" cy="457200"/>
+          </a:xfrm>
+          <a:prstGeom prst="rect">
+            <a:avLst/>
+          </a:prstGeom>
+          <a:noFill/>
+        </p:spPr>
+        <p:txBody>
+          <a:bodyPr wrap="square" anchor="t">
+            <a:spAutoFit/>
+          </a:bodyPr>
+          <a:lstStyle/>
+          <a:p>
+            <a:pPr algn="l">
+              <a:lnSpc>
+                <a:spcPct val="100000"/>
+              </a:lnSpc>
+            </a:pPr>
+            <a:r>
+              <a:rPr sz="1400" b="1" i="0">
+                <a:solidFill>
+                  <a:srgbClr val="E8ECEF"/>
+                </a:solidFill>
+                <a:latin typeface="Consolas"/>
+              </a:rPr>
+              <a:t>0.2149</a:t>
+            </a:r>
+          </a:p>
+        </p:txBody>
+      </p:sp>
+      <p:sp>
+        <p:nvSpPr>
+          <p:cNvPr id="24" name="TextBox 23"/>
+          <p:cNvSpPr txBox="1"/>
+          <p:nvPr/>
+        </p:nvSpPr>
+        <p:spPr>
+          <a:xfrm>
+            <a:off x="9235440" y="3666744"/>
+            <a:ext cx="2286000" cy="457200"/>
+          </a:xfrm>
+          <a:prstGeom prst="rect">
+            <a:avLst/>
+          </a:prstGeom>
+          <a:noFill/>
+        </p:spPr>
+        <p:txBody>
+          <a:bodyPr wrap="square" anchor="t">
+            <a:spAutoFit/>
+          </a:bodyPr>
+          <a:lstStyle/>
+          <a:p>
+            <a:pPr algn="l">
+              <a:lnSpc>
+                <a:spcPct val="100000"/>
+              </a:lnSpc>
+            </a:pPr>
+            <a:r>
+              <a:rPr sz="1400" b="1" i="0">
+                <a:solidFill>
+                  <a:srgbClr val="E8ECEF"/>
+                </a:solidFill>
+                <a:latin typeface="Consolas"/>
+              </a:rPr>
+              <a:t>NO</a:t>
+            </a:r>
+          </a:p>
+        </p:txBody>
+      </p:sp>
+      <p:sp>
+        <p:nvSpPr>
+          <p:cNvPr id="25" name="Rounded Rectangle 24"/>
+          <p:cNvSpPr/>
+          <p:nvPr/>
+        </p:nvSpPr>
+        <p:spPr>
+          <a:xfrm>
+            <a:off x="640080" y="4114800"/>
+            <a:ext cx="10881360" cy="1600200"/>
           </a:xfrm>
           <a:prstGeom prst="roundRect">
             <a:avLst>
@@ -5902,424 +6658,85 @@
       </p:sp>
       <p:sp>
         <p:nvSpPr>
-          <p:cNvPr id="7" name="TextBox 6"/>
-          <p:cNvSpPr txBox="1"/>
-          <p:nvPr/>
-        </p:nvSpPr>
-        <p:spPr>
-          <a:xfrm>
-            <a:off x="896112" y="2487168"/>
-            <a:ext cx="2980944" cy="365760"/>
-          </a:xfrm>
-          <a:prstGeom prst="rect">
-            <a:avLst/>
-          </a:prstGeom>
-          <a:noFill/>
-        </p:spPr>
-        <p:txBody>
-          <a:bodyPr wrap="square" anchor="t">
-            <a:spAutoFit/>
-          </a:bodyPr>
-          <a:lstStyle/>
-          <a:p>
-            <a:pPr algn="l">
-              <a:lnSpc>
-                <a:spcPct val="100000"/>
-              </a:lnSpc>
-            </a:pPr>
-            <a:r>
-              <a:rPr sz="1400" b="1" i="0">
-                <a:solidFill>
-                  <a:srgbClr val="2E9CB8"/>
+          <p:cNvPr id="26" name="TextBox 25"/>
+          <p:cNvSpPr txBox="1"/>
+          <p:nvPr/>
+        </p:nvSpPr>
+        <p:spPr>
+          <a:xfrm>
+            <a:off x="914400" y="4315968"/>
+            <a:ext cx="10332720" cy="1325880"/>
+          </a:xfrm>
+          <a:prstGeom prst="rect">
+            <a:avLst/>
+          </a:prstGeom>
+          <a:noFill/>
+        </p:spPr>
+        <p:txBody>
+          <a:bodyPr wrap="square" anchor="t">
+            <a:spAutoFit/>
+          </a:bodyPr>
+          <a:lstStyle/>
+          <a:p>
+            <a:pPr algn="l">
+              <a:lnSpc>
+                <a:spcPct val="114000"/>
+              </a:lnSpc>
+            </a:pPr>
+            <a:r>
+              <a:rPr sz="1300" b="0" i="0">
+                <a:solidFill>
+                  <a:srgbClr val="E8ECEF"/>
                 </a:solidFill>
                 <a:latin typeface="Calibri"/>
               </a:rPr>
-              <a:t>Audited</a:t>
-            </a:r>
-          </a:p>
-        </p:txBody>
-      </p:sp>
-      <p:sp>
-        <p:nvSpPr>
-          <p:cNvPr id="8" name="TextBox 7"/>
-          <p:cNvSpPr txBox="1"/>
-          <p:nvPr/>
-        </p:nvSpPr>
-        <p:spPr>
-          <a:xfrm>
-            <a:off x="896112" y="2907792"/>
-            <a:ext cx="2980944" cy="1188720"/>
-          </a:xfrm>
-          <a:prstGeom prst="rect">
-            <a:avLst/>
-          </a:prstGeom>
-          <a:noFill/>
-        </p:spPr>
-        <p:txBody>
-          <a:bodyPr wrap="square" anchor="t">
-            <a:spAutoFit/>
-          </a:bodyPr>
-          <a:lstStyle/>
-          <a:p>
-            <a:pPr algn="l">
-              <a:lnSpc>
-                <a:spcPct val="105000"/>
-              </a:lnSpc>
-            </a:pPr>
-            <a:r>
-              <a:rPr sz="1100" b="0" i="0">
-                <a:solidFill>
-                  <a:srgbClr val="8A9299"/>
+              <a:t>Portable AP films are taken of patients too unwell to stand, so view position correlates with severity. The FPR gap is 0.2149 while the TPR gap is only 0.0228 — the model is not MISSING more disease on AP films, it is OVER-CALLING it. That asymmetry is the signature of a shortcut, and aggregate AUROC would never have shown it.</a:t>
+            </a:r>
+          </a:p>
+        </p:txBody>
+      </p:sp>
+      <p:sp>
+        <p:nvSpPr>
+          <p:cNvPr id="27" name="TextBox 26"/>
+          <p:cNvSpPr txBox="1"/>
+          <p:nvPr/>
+        </p:nvSpPr>
+        <p:spPr>
+          <a:xfrm>
+            <a:off x="640080" y="5852160"/>
+            <a:ext cx="10881360" cy="365760"/>
+          </a:xfrm>
+          <a:prstGeom prst="rect">
+            <a:avLst/>
+          </a:prstGeom>
+          <a:noFill/>
+        </p:spPr>
+        <p:txBody>
+          <a:bodyPr wrap="square" anchor="t">
+            <a:spAutoFit/>
+          </a:bodyPr>
+          <a:lstStyle/>
+          <a:p>
+            <a:pPr algn="l">
+              <a:lnSpc>
+                <a:spcPct val="100000"/>
+              </a:lnSpc>
+            </a:pPr>
+            <a:r>
+              <a:rPr sz="1200" b="1" i="0">
+                <a:solidFill>
+                  <a:srgbClr val="D64541"/>
                 </a:solidFill>
                 <a:latin typeface="Calibri"/>
               </a:rPr>
-              <a:t>Equalised-odds gaps across sex, age band and view position. Reported whether favourable or not.</a:t>
-            </a:r>
-          </a:p>
-        </p:txBody>
-      </p:sp>
-      <p:sp>
-        <p:nvSpPr>
-          <p:cNvPr id="9" name="Rounded Rectangle 8"/>
-          <p:cNvSpPr/>
-          <p:nvPr/>
-        </p:nvSpPr>
-        <p:spPr>
-          <a:xfrm>
-            <a:off x="4334256" y="2286000"/>
-            <a:ext cx="3493008" cy="2011680"/>
-          </a:xfrm>
-          <a:prstGeom prst="roundRect">
-            <a:avLst>
-              <a:gd name="adj" fmla="val 3000"/>
-            </a:avLst>
-          </a:prstGeom>
-          <a:solidFill>
-            <a:srgbClr val="16191B"/>
-          </a:solidFill>
-          <a:ln w="9525">
-            <a:solidFill>
-              <a:srgbClr val="2A2F33"/>
-            </a:solidFill>
-          </a:ln>
-          <a:effectLst/>
-        </p:spPr>
-        <p:style>
-          <a:lnRef idx="1">
-            <a:schemeClr val="accent1"/>
-          </a:lnRef>
-          <a:fillRef idx="3">
-            <a:schemeClr val="accent1"/>
-          </a:fillRef>
-          <a:effectRef idx="2">
-            <a:schemeClr val="accent1"/>
-          </a:effectRef>
-          <a:fontRef idx="minor">
-            <a:schemeClr val="lt1"/>
-          </a:fontRef>
-        </p:style>
-        <p:txBody>
-          <a:bodyPr rtlCol="0" anchor="ctr"/>
-          <a:lstStyle/>
-          <a:p>
-            <a:pPr algn="ctr"/>
-          </a:p>
-        </p:txBody>
-      </p:sp>
-      <p:sp>
-        <p:nvSpPr>
-          <p:cNvPr id="10" name="TextBox 9"/>
-          <p:cNvSpPr txBox="1"/>
-          <p:nvPr/>
-        </p:nvSpPr>
-        <p:spPr>
-          <a:xfrm>
-            <a:off x="4590288" y="2487168"/>
-            <a:ext cx="2980944" cy="365760"/>
-          </a:xfrm>
-          <a:prstGeom prst="rect">
-            <a:avLst/>
-          </a:prstGeom>
-          <a:noFill/>
-        </p:spPr>
-        <p:txBody>
-          <a:bodyPr wrap="square" anchor="t">
-            <a:spAutoFit/>
-          </a:bodyPr>
-          <a:lstStyle/>
-          <a:p>
-            <a:pPr algn="l">
-              <a:lnSpc>
-                <a:spcPct val="100000"/>
-              </a:lnSpc>
-            </a:pPr>
-            <a:r>
-              <a:rPr sz="1400" b="1" i="0">
-                <a:solidFill>
-                  <a:srgbClr val="2E9CB8"/>
-                </a:solidFill>
-                <a:latin typeface="Calibri"/>
-              </a:rPr>
-              <a:t>The AP/PA shortcut</a:t>
-            </a:r>
-          </a:p>
-        </p:txBody>
-      </p:sp>
-      <p:sp>
-        <p:nvSpPr>
-          <p:cNvPr id="11" name="TextBox 10"/>
-          <p:cNvSpPr txBox="1"/>
-          <p:nvPr/>
-        </p:nvSpPr>
-        <p:spPr>
-          <a:xfrm>
-            <a:off x="4590288" y="2907792"/>
-            <a:ext cx="2980944" cy="1188720"/>
-          </a:xfrm>
-          <a:prstGeom prst="rect">
-            <a:avLst/>
-          </a:prstGeom>
-          <a:noFill/>
-        </p:spPr>
-        <p:txBody>
-          <a:bodyPr wrap="square" anchor="t">
-            <a:spAutoFit/>
-          </a:bodyPr>
-          <a:lstStyle/>
-          <a:p>
-            <a:pPr algn="l">
-              <a:lnSpc>
-                <a:spcPct val="105000"/>
-              </a:lnSpc>
-            </a:pPr>
-            <a:r>
-              <a:rPr sz="1100" b="0" i="0">
-                <a:solidFill>
-                  <a:srgbClr val="8A9299"/>
-                </a:solidFill>
-                <a:latin typeface="Calibri"/>
-              </a:rPr>
-              <a:t>Portable AP films come from sicker patients. A model can read 'AP film' as 'sick patient' — and fail when practice changes.</a:t>
-            </a:r>
-          </a:p>
-        </p:txBody>
-      </p:sp>
-      <p:sp>
-        <p:nvSpPr>
-          <p:cNvPr id="12" name="Rounded Rectangle 11"/>
-          <p:cNvSpPr/>
-          <p:nvPr/>
-        </p:nvSpPr>
-        <p:spPr>
-          <a:xfrm>
-            <a:off x="8028431" y="2286000"/>
-            <a:ext cx="3493008" cy="2011680"/>
-          </a:xfrm>
-          <a:prstGeom prst="roundRect">
-            <a:avLst>
-              <a:gd name="adj" fmla="val 3000"/>
-            </a:avLst>
-          </a:prstGeom>
-          <a:solidFill>
-            <a:srgbClr val="16191B"/>
-          </a:solidFill>
-          <a:ln w="9525">
-            <a:solidFill>
-              <a:srgbClr val="2A2F33"/>
-            </a:solidFill>
-          </a:ln>
-          <a:effectLst/>
-        </p:spPr>
-        <p:style>
-          <a:lnRef idx="1">
-            <a:schemeClr val="accent1"/>
-          </a:lnRef>
-          <a:fillRef idx="3">
-            <a:schemeClr val="accent1"/>
-          </a:fillRef>
-          <a:effectRef idx="2">
-            <a:schemeClr val="accent1"/>
-          </a:effectRef>
-          <a:fontRef idx="minor">
-            <a:schemeClr val="lt1"/>
-          </a:fontRef>
-        </p:style>
-        <p:txBody>
-          <a:bodyPr rtlCol="0" anchor="ctr"/>
-          <a:lstStyle/>
-          <a:p>
-            <a:pPr algn="ctr"/>
-          </a:p>
-        </p:txBody>
-      </p:sp>
-      <p:sp>
-        <p:nvSpPr>
-          <p:cNvPr id="13" name="TextBox 12"/>
-          <p:cNvSpPr txBox="1"/>
-          <p:nvPr/>
-        </p:nvSpPr>
-        <p:spPr>
-          <a:xfrm>
-            <a:off x="8284463" y="2487168"/>
-            <a:ext cx="2980944" cy="365760"/>
-          </a:xfrm>
-          <a:prstGeom prst="rect">
-            <a:avLst/>
-          </a:prstGeom>
-          <a:noFill/>
-        </p:spPr>
-        <p:txBody>
-          <a:bodyPr wrap="square" anchor="t">
-            <a:spAutoFit/>
-          </a:bodyPr>
-          <a:lstStyle/>
-          <a:p>
-            <a:pPr algn="l">
-              <a:lnSpc>
-                <a:spcPct val="100000"/>
-              </a:lnSpc>
-            </a:pPr>
-            <a:r>
-              <a:rPr sz="1400" b="1" i="0">
-                <a:solidFill>
-                  <a:srgbClr val="2E9CB8"/>
-                </a:solidFill>
-                <a:latin typeface="Calibri"/>
-              </a:rPr>
-              <a:t>Cannot audit</a:t>
-            </a:r>
-          </a:p>
-        </p:txBody>
-      </p:sp>
-      <p:sp>
-        <p:nvSpPr>
-          <p:cNvPr id="14" name="TextBox 13"/>
-          <p:cNvSpPr txBox="1"/>
-          <p:nvPr/>
-        </p:nvSpPr>
-        <p:spPr>
-          <a:xfrm>
-            <a:off x="8284463" y="2907792"/>
-            <a:ext cx="2980944" cy="1188720"/>
-          </a:xfrm>
-          <a:prstGeom prst="rect">
-            <a:avLst/>
-          </a:prstGeom>
-          <a:noFill/>
-        </p:spPr>
-        <p:txBody>
-          <a:bodyPr wrap="square" anchor="t">
-            <a:spAutoFit/>
-          </a:bodyPr>
-          <a:lstStyle/>
-          <a:p>
-            <a:pPr algn="l">
-              <a:lnSpc>
-                <a:spcPct val="105000"/>
-              </a:lnSpc>
-            </a:pPr>
-            <a:r>
-              <a:rPr sz="1100" b="0" i="0">
-                <a:solidFill>
-                  <a:srgbClr val="8A9299"/>
-                </a:solidFill>
-                <a:latin typeface="Calibri"/>
-              </a:rPr>
-              <a:t>ChestX-ray14 has no race or ethnicity labels. A documented axis of disparity is invisible here.</a:t>
-            </a:r>
-          </a:p>
-        </p:txBody>
-      </p:sp>
-      <p:sp>
-        <p:nvSpPr>
-          <p:cNvPr id="15" name="Rounded Rectangle 14"/>
-          <p:cNvSpPr/>
-          <p:nvPr/>
-        </p:nvSpPr>
-        <p:spPr>
-          <a:xfrm>
-            <a:off x="640080" y="4572000"/>
-            <a:ext cx="10881360" cy="1143000"/>
-          </a:xfrm>
-          <a:prstGeom prst="roundRect">
-            <a:avLst>
-              <a:gd name="adj" fmla="val 3000"/>
-            </a:avLst>
-          </a:prstGeom>
-          <a:solidFill>
-            <a:srgbClr val="16191B"/>
-          </a:solidFill>
-          <a:ln w="9525">
-            <a:solidFill>
-              <a:srgbClr val="2A2F33"/>
-            </a:solidFill>
-          </a:ln>
-          <a:effectLst/>
-        </p:spPr>
-        <p:style>
-          <a:lnRef idx="1">
-            <a:schemeClr val="accent1"/>
-          </a:lnRef>
-          <a:fillRef idx="3">
-            <a:schemeClr val="accent1"/>
-          </a:fillRef>
-          <a:effectRef idx="2">
-            <a:schemeClr val="accent1"/>
-          </a:effectRef>
-          <a:fontRef idx="minor">
-            <a:schemeClr val="lt1"/>
-          </a:fontRef>
-        </p:style>
-        <p:txBody>
-          <a:bodyPr rtlCol="0" anchor="ctr"/>
-          <a:lstStyle/>
-          <a:p>
-            <a:pPr algn="ctr"/>
-          </a:p>
-        </p:txBody>
-      </p:sp>
-      <p:sp>
-        <p:nvSpPr>
-          <p:cNvPr id="16" name="TextBox 15"/>
-          <p:cNvSpPr txBox="1"/>
-          <p:nvPr/>
-        </p:nvSpPr>
-        <p:spPr>
-          <a:xfrm>
-            <a:off x="914400" y="4800600"/>
-            <a:ext cx="10332720" cy="822960"/>
-          </a:xfrm>
-          <a:prstGeom prst="rect">
-            <a:avLst/>
-          </a:prstGeom>
-          <a:noFill/>
-        </p:spPr>
-        <p:txBody>
-          <a:bodyPr wrap="square" anchor="t">
-            <a:spAutoFit/>
-          </a:bodyPr>
-          <a:lstStyle/>
-          <a:p>
-            <a:pPr algn="l">
-              <a:lnSpc>
-                <a:spcPct val="100000"/>
-              </a:lnSpc>
-            </a:pPr>
-            <a:r>
-              <a:rPr sz="1500" b="1" i="0">
-                <a:solidFill>
-                  <a:srgbClr val="D64541"/>
-                </a:solidFill>
-                <a:latin typeface="Calibri"/>
-              </a:rPr>
-              <a:t>That absence is itself a finding. It is not, and must not be presented as, an absence of bias.</a:t>
-            </a:r>
-          </a:p>
-        </p:txBody>
-      </p:sp>
-      <p:sp>
-        <p:nvSpPr>
-          <p:cNvPr id="17" name="TextBox 16"/>
+              <a:t>ChestX-ray14 has no race labels — that axis cannot be audited at all, and that absence is a finding, not an absence of bias.</a:t>
+            </a:r>
+          </a:p>
+        </p:txBody>
+      </p:sp>
+      <p:sp>
+        <p:nvSpPr>
+          <p:cNvPr id="28" name="TextBox 27"/>
           <p:cNvSpPr txBox="1"/>
           <p:nvPr/>
         </p:nvSpPr>
@@ -7658,8 +8075,8 @@
         </p:nvSpPr>
         <p:spPr>
           <a:xfrm>
-            <a:off x="640080" y="2286000"/>
-            <a:ext cx="5394960" cy="658368"/>
+            <a:off x="640080" y="2194560"/>
+            <a:ext cx="5394960" cy="603504"/>
           </a:xfrm>
           <a:prstGeom prst="rect">
             <a:avLst/>
@@ -7697,8 +8114,8 @@
         </p:nvSpPr>
         <p:spPr>
           <a:xfrm>
-            <a:off x="6035040" y="2286000"/>
-            <a:ext cx="5486400" cy="658368"/>
+            <a:off x="6035040" y="2194560"/>
+            <a:ext cx="5486400" cy="603504"/>
           </a:xfrm>
           <a:prstGeom prst="rect">
             <a:avLst/>
@@ -7736,7 +8153,7 @@
         </p:nvSpPr>
         <p:spPr>
           <a:xfrm>
-            <a:off x="640080" y="2926079"/>
+            <a:off x="640080" y="2779776"/>
             <a:ext cx="10881360" cy="12700"/>
           </a:xfrm>
           <a:prstGeom prst="rect">
@@ -7780,8 +8197,8 @@
         </p:nvSpPr>
         <p:spPr>
           <a:xfrm>
-            <a:off x="640080" y="2999232"/>
-            <a:ext cx="5394960" cy="658368"/>
+            <a:off x="640080" y="2852928"/>
+            <a:ext cx="5394960" cy="603504"/>
           </a:xfrm>
           <a:prstGeom prst="rect">
             <a:avLst/>
@@ -7819,8 +8236,8 @@
         </p:nvSpPr>
         <p:spPr>
           <a:xfrm>
-            <a:off x="6035040" y="2999232"/>
-            <a:ext cx="5486400" cy="658368"/>
+            <a:off x="6035040" y="2852928"/>
+            <a:ext cx="5486400" cy="603504"/>
           </a:xfrm>
           <a:prstGeom prst="rect">
             <a:avLst/>
@@ -7858,7 +8275,7 @@
         </p:nvSpPr>
         <p:spPr>
           <a:xfrm>
-            <a:off x="640080" y="3621024"/>
+            <a:off x="640080" y="3419856"/>
             <a:ext cx="10881360" cy="6350"/>
           </a:xfrm>
           <a:prstGeom prst="rect">
@@ -7902,8 +8319,8 @@
         </p:nvSpPr>
         <p:spPr>
           <a:xfrm>
-            <a:off x="640080" y="3657600"/>
-            <a:ext cx="5394960" cy="658368"/>
+            <a:off x="640080" y="3456432"/>
+            <a:ext cx="5394960" cy="603504"/>
           </a:xfrm>
           <a:prstGeom prst="rect">
             <a:avLst/>
@@ -7941,8 +8358,8 @@
         </p:nvSpPr>
         <p:spPr>
           <a:xfrm>
-            <a:off x="6035040" y="3657600"/>
-            <a:ext cx="5486400" cy="658368"/>
+            <a:off x="6035040" y="3456432"/>
+            <a:ext cx="5486400" cy="603504"/>
           </a:xfrm>
           <a:prstGeom prst="rect">
             <a:avLst/>
@@ -7980,7 +8397,7 @@
         </p:nvSpPr>
         <p:spPr>
           <a:xfrm>
-            <a:off x="640080" y="4279392"/>
+            <a:off x="640080" y="4023360"/>
             <a:ext cx="10881360" cy="6350"/>
           </a:xfrm>
           <a:prstGeom prst="rect">
@@ -8024,8 +8441,8 @@
         </p:nvSpPr>
         <p:spPr>
           <a:xfrm>
-            <a:off x="640080" y="4315968"/>
-            <a:ext cx="5394960" cy="658368"/>
+            <a:off x="640080" y="4059936"/>
+            <a:ext cx="5394960" cy="603504"/>
           </a:xfrm>
           <a:prstGeom prst="rect">
             <a:avLst/>
@@ -8050,7 +8467,7 @@
                 </a:solidFill>
                 <a:latin typeface="Calibri"/>
               </a:rPr>
-              <a:t>Displayed score ≠ decision score</a:t>
+              <a:t>int8 model unexecutable in production</a:t>
             </a:r>
           </a:p>
         </p:txBody>
@@ -8063,8 +8480,8 @@
         </p:nvSpPr>
         <p:spPr>
           <a:xfrm>
-            <a:off x="6035040" y="4315968"/>
-            <a:ext cx="5486400" cy="658368"/>
+            <a:off x="6035040" y="4059936"/>
+            <a:ext cx="5486400" cy="603504"/>
           </a:xfrm>
           <a:prstGeom prst="rect">
             <a:avLst/>
@@ -8089,7 +8506,7 @@
                 </a:solidFill>
                 <a:latin typeface="Consolas"/>
               </a:rPr>
-              <a:t>Checking included == (p &gt;= threshold) for all 14 labels</a:t>
+              <a:t>Creating a session, not just checking numerical agreement</a:t>
             </a:r>
           </a:p>
         </p:txBody>
@@ -8102,7 +8519,7 @@
         </p:nvSpPr>
         <p:spPr>
           <a:xfrm>
-            <a:off x="640080" y="4937759"/>
+            <a:off x="640080" y="4626864"/>
             <a:ext cx="10881360" cy="6350"/>
           </a:xfrm>
           <a:prstGeom prst="rect">
@@ -8146,8 +8563,8 @@
         </p:nvSpPr>
         <p:spPr>
           <a:xfrm>
-            <a:off x="640080" y="4974336"/>
-            <a:ext cx="5394960" cy="658368"/>
+            <a:off x="640080" y="4663440"/>
+            <a:ext cx="5394960" cy="603504"/>
           </a:xfrm>
           <a:prstGeom prst="rect">
             <a:avLst/>
@@ -8172,7 +8589,7 @@
                 </a:solidFill>
                 <a:latin typeface="Calibri"/>
               </a:rPr>
-              <a:t>Trend said 'worsening', findings said 'no change'</a:t>
+              <a:t>ReLU zeroed 11 of 14 activation maps</a:t>
             </a:r>
           </a:p>
         </p:txBody>
@@ -8185,8 +8602,8 @@
         </p:nvSpPr>
         <p:spPr>
           <a:xfrm>
-            <a:off x="6035040" y="4974336"/>
-            <a:ext cx="5486400" cy="658368"/>
+            <a:off x="6035040" y="4663440"/>
+            <a:ext cx="5486400" cy="603504"/>
           </a:xfrm>
           <a:prstGeom prst="rect">
             <a:avLst/>
@@ -8211,14 +8628,136 @@
                 </a:solidFill>
                 <a:latin typeface="Consolas"/>
               </a:rPr>
-              <a:t>A test asserting the two agree</a:t>
-            </a:r>
-          </a:p>
-        </p:txBody>
-      </p:sp>
-      <p:sp>
-        <p:nvSpPr>
-          <p:cNvPr id="20" name="Rounded Rectangle 19"/>
+              <a:t>Noticing CAM is an evidence field, not a gradient product</a:t>
+            </a:r>
+          </a:p>
+        </p:txBody>
+      </p:sp>
+      <p:sp>
+        <p:nvSpPr>
+          <p:cNvPr id="20" name="Rectangle 19"/>
+          <p:cNvSpPr/>
+          <p:nvPr/>
+        </p:nvSpPr>
+        <p:spPr>
+          <a:xfrm>
+            <a:off x="640080" y="5230368"/>
+            <a:ext cx="10881360" cy="6350"/>
+          </a:xfrm>
+          <a:prstGeom prst="rect">
+            <a:avLst/>
+          </a:prstGeom>
+          <a:solidFill>
+            <a:srgbClr val="2A2F33"/>
+          </a:solidFill>
+          <a:ln>
+            <a:noFill/>
+          </a:ln>
+          <a:effectLst/>
+        </p:spPr>
+        <p:style>
+          <a:lnRef idx="1">
+            <a:schemeClr val="accent1"/>
+          </a:lnRef>
+          <a:fillRef idx="3">
+            <a:schemeClr val="accent1"/>
+          </a:fillRef>
+          <a:effectRef idx="2">
+            <a:schemeClr val="accent1"/>
+          </a:effectRef>
+          <a:fontRef idx="minor">
+            <a:schemeClr val="lt1"/>
+          </a:fontRef>
+        </p:style>
+        <p:txBody>
+          <a:bodyPr rtlCol="0" anchor="ctr"/>
+          <a:lstStyle/>
+          <a:p>
+            <a:pPr algn="ctr"/>
+          </a:p>
+        </p:txBody>
+      </p:sp>
+      <p:sp>
+        <p:nvSpPr>
+          <p:cNvPr id="21" name="TextBox 20"/>
+          <p:cNvSpPr txBox="1"/>
+          <p:nvPr/>
+        </p:nvSpPr>
+        <p:spPr>
+          <a:xfrm>
+            <a:off x="640080" y="5266944"/>
+            <a:ext cx="5394960" cy="603504"/>
+          </a:xfrm>
+          <a:prstGeom prst="rect">
+            <a:avLst/>
+          </a:prstGeom>
+          <a:noFill/>
+        </p:spPr>
+        <p:txBody>
+          <a:bodyPr wrap="square" anchor="t">
+            <a:spAutoFit/>
+          </a:bodyPr>
+          <a:lstStyle/>
+          <a:p>
+            <a:pPr algn="l">
+              <a:lnSpc>
+                <a:spcPct val="100000"/>
+              </a:lnSpc>
+            </a:pPr>
+            <a:r>
+              <a:rPr sz="1300" b="0" i="0">
+                <a:solidFill>
+                  <a:srgbClr val="8A9299"/>
+                </a:solidFill>
+                <a:latin typeface="Calibri"/>
+              </a:rPr>
+              <a:t>Rate limiter bucketed the whole world</a:t>
+            </a:r>
+          </a:p>
+        </p:txBody>
+      </p:sp>
+      <p:sp>
+        <p:nvSpPr>
+          <p:cNvPr id="22" name="TextBox 21"/>
+          <p:cNvSpPr txBox="1"/>
+          <p:nvPr/>
+        </p:nvSpPr>
+        <p:spPr>
+          <a:xfrm>
+            <a:off x="6035040" y="5266944"/>
+            <a:ext cx="5486400" cy="603504"/>
+          </a:xfrm>
+          <a:prstGeom prst="rect">
+            <a:avLst/>
+          </a:prstGeom>
+          <a:noFill/>
+        </p:spPr>
+        <p:txBody>
+          <a:bodyPr wrap="square" anchor="t">
+            <a:spAutoFit/>
+          </a:bodyPr>
+          <a:lstStyle/>
+          <a:p>
+            <a:pPr algn="l">
+              <a:lnSpc>
+                <a:spcPct val="100000"/>
+              </a:lnSpc>
+            </a:pPr>
+            <a:r>
+              <a:rPr sz="1300" b="0" i="0">
+                <a:solidFill>
+                  <a:srgbClr val="8A9299"/>
+                </a:solidFill>
+                <a:latin typeface="Consolas"/>
+              </a:rPr>
+              <a:t>Asserting two clients behind one proxy get separate budgets</a:t>
+            </a:r>
+          </a:p>
+        </p:txBody>
+      </p:sp>
+      <p:sp>
+        <p:nvSpPr>
+          <p:cNvPr id="23" name="Rounded Rectangle 22"/>
           <p:cNvSpPr/>
           <p:nvPr/>
         </p:nvSpPr>
@@ -8266,7 +8805,7 @@
       </p:sp>
       <p:sp>
         <p:nvSpPr>
-          <p:cNvPr id="21" name="TextBox 20"/>
+          <p:cNvPr id="24" name="TextBox 23"/>
           <p:cNvSpPr txBox="1"/>
           <p:nvPr/>
         </p:nvSpPr>
@@ -8305,7 +8844,7 @@
       </p:sp>
       <p:sp>
         <p:nvSpPr>
-          <p:cNvPr id="22" name="TextBox 21"/>
+          <p:cNvPr id="25" name="TextBox 24"/>
           <p:cNvSpPr txBox="1"/>
           <p:nvPr/>
         </p:nvSpPr>
@@ -9136,7 +9675,7 @@
                 </a:solidFill>
                 <a:latin typeface="Consolas"/>
               </a:rPr>
-              <a:t>0.94</a:t>
+              <a:t>0.87</a:t>
             </a:r>
           </a:p>
         </p:txBody>
@@ -13594,7 +14133,7 @@
                 </a:solidFill>
                 <a:latin typeface="Consolas"/>
               </a:rPr>
-              <a:t>CONFORMAL COVERAGE</a:t>
+              <a:t>MEASURED COVERAGE</a:t>
             </a:r>
           </a:p>
         </p:txBody>
@@ -13629,11 +14168,11 @@
             <a:r>
               <a:rPr sz="4400" b="1" i="0">
                 <a:solidFill>
-                  <a:srgbClr val="2E9CB8"/>
+                  <a:srgbClr val="D9903F"/>
                 </a:solidFill>
                 <a:latin typeface="Consolas"/>
               </a:rPr>
-              <a:t>0.9004</a:t>
+              <a:t>0.8845</a:t>
             </a:r>
           </a:p>
         </p:txBody>
@@ -13647,7 +14186,7 @@
         <p:spPr>
           <a:xfrm>
             <a:off x="914400" y="4114800"/>
-            <a:ext cx="4754880" cy="731520"/>
+            <a:ext cx="4754880" cy="822960"/>
           </a:xfrm>
           <a:prstGeom prst="rect">
             <a:avLst/>
@@ -13672,7 +14211,7 @@
                 </a:solidFill>
                 <a:latin typeface="Calibri"/>
               </a:rPr>
-              <a:t>against a 0.90 nominal target</a:t>
+              <a:t>against a 0.90 target — BELOW</a:t>
             </a:r>
           </a:p>
           <a:p>
@@ -13688,7 +14227,23 @@
                 </a:solidFill>
                 <a:latin typeface="Calibri"/>
               </a:rPr>
-              <a:t>per-label range 0.837 – 0.967</a:t>
+              <a:t>4,999 radiographs, 1,335 patients</a:t>
+            </a:r>
+          </a:p>
+          <a:p>
+            <a:pPr algn="l">
+              <a:lnSpc>
+                <a:spcPct val="110000"/>
+              </a:lnSpc>
+            </a:pPr>
+            <a:r>
+              <a:rPr sz="1200" b="0" i="0">
+                <a:solidFill>
+                  <a:srgbClr val="8A9299"/>
+                </a:solidFill>
+                <a:latin typeface="Calibri"/>
+              </a:rPr>
+              <a:t>patient-disjoint split</a:t>
             </a:r>
           </a:p>
         </p:txBody>
@@ -13775,7 +14330,7 @@
                 </a:solidFill>
                 <a:latin typeface="Consolas"/>
               </a:rPr>
-              <a:t>BACKPROP GRADIENT CHECK</a:t>
+              <a:t>WHY IT FALLS SHORT</a:t>
             </a:r>
           </a:p>
         </p:txBody>
@@ -13789,32 +14344,128 @@
         <p:spPr>
           <a:xfrm>
             <a:off x="6492240" y="3291840"/>
-            <a:ext cx="4754880" cy="731520"/>
-          </a:xfrm>
-          <a:prstGeom prst="rect">
-            <a:avLst/>
-          </a:prstGeom>
-          <a:noFill/>
-        </p:spPr>
-        <p:txBody>
-          <a:bodyPr wrap="square" anchor="t">
-            <a:spAutoFit/>
-          </a:bodyPr>
-          <a:lstStyle/>
-          <a:p>
-            <a:pPr algn="l">
-              <a:lnSpc>
-                <a:spcPct val="100000"/>
-              </a:lnSpc>
-            </a:pPr>
-            <a:r>
-              <a:rPr sz="4400" b="1" i="0">
-                <a:solidFill>
-                  <a:srgbClr val="2E9CB8"/>
-                </a:solidFill>
-                <a:latin typeface="Consolas"/>
-              </a:rPr>
-              <a:t>7.2e-11</a:t>
+            <a:ext cx="4754880" cy="1737360"/>
+          </a:xfrm>
+          <a:prstGeom prst="rect">
+            <a:avLst/>
+          </a:prstGeom>
+          <a:noFill/>
+        </p:spPr>
+        <p:txBody>
+          <a:bodyPr wrap="square" anchor="t">
+            <a:spAutoFit/>
+          </a:bodyPr>
+          <a:lstStyle/>
+          <a:p>
+            <a:pPr algn="l">
+              <a:lnSpc>
+                <a:spcPct val="112000"/>
+              </a:lnSpc>
+            </a:pPr>
+            <a:r>
+              <a:rPr sz="1200" b="0" i="0">
+                <a:solidFill>
+                  <a:srgbClr val="E8ECEF"/>
+                </a:solidFill>
+                <a:latin typeface="Calibri"/>
+              </a:rPr>
+              <a:t>Coverage assumes exchangeability.</a:t>
+            </a:r>
+          </a:p>
+          <a:p>
+            <a:pPr algn="l">
+              <a:lnSpc>
+                <a:spcPct val="112000"/>
+              </a:lnSpc>
+            </a:pPr>
+            <a:r>
+              <a:rPr sz="1200" b="0" i="0">
+                <a:solidFill>
+                  <a:srgbClr val="E8ECEF"/>
+                </a:solidFill>
+                <a:latin typeface="Calibri"/>
+              </a:rPr>
+              <a:t>Splitting by PATIENT is required</a:t>
+            </a:r>
+          </a:p>
+          <a:p>
+            <a:pPr algn="l">
+              <a:lnSpc>
+                <a:spcPct val="112000"/>
+              </a:lnSpc>
+            </a:pPr>
+            <a:r>
+              <a:rPr sz="1200" b="0" i="0">
+                <a:solidFill>
+                  <a:srgbClr val="E8ECEF"/>
+                </a:solidFill>
+                <a:latin typeface="Calibri"/>
+              </a:rPr>
+              <a:t>to avoid follow-up leakage — and</a:t>
+            </a:r>
+          </a:p>
+          <a:p>
+            <a:pPr algn="l">
+              <a:lnSpc>
+                <a:spcPct val="112000"/>
+              </a:lnSpc>
+            </a:pPr>
+            <a:r>
+              <a:rPr sz="1200" b="0" i="0">
+                <a:solidFill>
+                  <a:srgbClr val="E8ECEF"/>
+                </a:solidFill>
+                <a:latin typeface="Calibri"/>
+              </a:rPr>
+              <a:t>breaks exchangeability.</a:t>
+            </a:r>
+          </a:p>
+          <a:p>
+            <a:pPr algn="l">
+              <a:lnSpc>
+                <a:spcPct val="112000"/>
+              </a:lnSpc>
+            </a:pPr>
+            <a:r>
+              <a:rPr sz="1200" b="0" i="0">
+                <a:solidFill>
+                  <a:srgbClr val="E8ECEF"/>
+                </a:solidFill>
+                <a:latin typeface="Calibri"/>
+              </a:rPr>
+              <a:t/>
+            </a:r>
+          </a:p>
+          <a:p>
+            <a:pPr algn="l">
+              <a:lnSpc>
+                <a:spcPct val="112000"/>
+              </a:lnSpc>
+            </a:pPr>
+            <a:r>
+              <a:rPr sz="1200" b="0" i="0">
+                <a:solidFill>
+                  <a:srgbClr val="E8ECEF"/>
+                </a:solidFill>
+                <a:latin typeface="Calibri"/>
+              </a:rPr>
+              <a:t>Pneumonia has 31 calibration</a:t>
+            </a:r>
+          </a:p>
+          <a:p>
+            <a:pPr algn="l">
+              <a:lnSpc>
+                <a:spcPct val="112000"/>
+              </a:lnSpc>
+            </a:pPr>
+            <a:r>
+              <a:rPr sz="1200" b="0" i="0">
+                <a:solidFill>
+                  <a:srgbClr val="E8ECEF"/>
+                </a:solidFill>
+                <a:latin typeface="Calibri"/>
+              </a:rPr>
+              <a:t>positives; its quantile is noisy.</a:t>
             </a:r>
           </a:p>
         </p:txBody>
@@ -13822,61 +14473,6 @@
       <p:sp>
         <p:nvSpPr>
           <p:cNvPr id="14" name="TextBox 13"/>
-          <p:cNvSpPr txBox="1"/>
-          <p:nvPr/>
-        </p:nvSpPr>
-        <p:spPr>
-          <a:xfrm>
-            <a:off x="6492240" y="4114800"/>
-            <a:ext cx="4754880" cy="731520"/>
-          </a:xfrm>
-          <a:prstGeom prst="rect">
-            <a:avLst/>
-          </a:prstGeom>
-          <a:noFill/>
-        </p:spPr>
-        <p:txBody>
-          <a:bodyPr wrap="square" anchor="t">
-            <a:spAutoFit/>
-          </a:bodyPr>
-          <a:lstStyle/>
-          <a:p>
-            <a:pPr algn="l">
-              <a:lnSpc>
-                <a:spcPct val="110000"/>
-              </a:lnSpc>
-            </a:pPr>
-            <a:r>
-              <a:rPr sz="1200" b="0" i="0">
-                <a:solidFill>
-                  <a:srgbClr val="8A9299"/>
-                </a:solidFill>
-                <a:latin typeface="Calibri"/>
-              </a:rPr>
-              <a:t>max relative error vs finite</a:t>
-            </a:r>
-          </a:p>
-          <a:p>
-            <a:pPr algn="l">
-              <a:lnSpc>
-                <a:spcPct val="110000"/>
-              </a:lnSpc>
-            </a:pPr>
-            <a:r>
-              <a:rPr sz="1200" b="0" i="0">
-                <a:solidFill>
-                  <a:srgbClr val="8A9299"/>
-                </a:solidFill>
-                <a:latin typeface="Calibri"/>
-              </a:rPr>
-              <a:t>differences — from-scratch NumPy</a:t>
-            </a:r>
-          </a:p>
-        </p:txBody>
-      </p:sp>
-      <p:sp>
-        <p:nvSpPr>
-          <p:cNvPr id="15" name="TextBox 14"/>
           <p:cNvSpPr txBox="1"/>
           <p:nvPr/>
         </p:nvSpPr>

--- a/deliverables/decks/SENTINEL-CXR_Final.pptx
+++ b/deliverables/decks/SENTINEL-CXR_Final.pptx
@@ -3477,7 +3477,7 @@
         <p:spPr>
           <a:xfrm>
             <a:off x="640080" y="5760720"/>
-            <a:ext cx="10881360" cy="365760"/>
+            <a:ext cx="5943600" cy="365760"/>
           </a:xfrm>
           <a:prstGeom prst="rect">
             <a:avLst/>
@@ -3510,6 +3510,61 @@
       <p:sp>
         <p:nvSpPr>
           <p:cNvPr id="12" name="TextBox 11"/>
+          <p:cNvSpPr txBox="1"/>
+          <p:nvPr/>
+        </p:nvSpPr>
+        <p:spPr>
+          <a:xfrm>
+            <a:off x="6766560" y="5623560"/>
+            <a:ext cx="4754880" cy="640080"/>
+          </a:xfrm>
+          <a:prstGeom prst="rect">
+            <a:avLst/>
+          </a:prstGeom>
+          <a:noFill/>
+        </p:spPr>
+        <p:txBody>
+          <a:bodyPr wrap="square" anchor="t">
+            <a:spAutoFit/>
+          </a:bodyPr>
+          <a:lstStyle/>
+          <a:p>
+            <a:pPr algn="r">
+              <a:lnSpc>
+                <a:spcPct val="120000"/>
+              </a:lnSpc>
+            </a:pPr>
+            <a:r>
+              <a:rPr sz="1100" b="0" i="0">
+                <a:solidFill>
+                  <a:srgbClr val="E8ECEF"/>
+                </a:solidFill>
+                <a:latin typeface="Consolas"/>
+              </a:rPr>
+              <a:t>LIVE  sentinel-cxr.vercel.app</a:t>
+            </a:r>
+          </a:p>
+          <a:p>
+            <a:pPr algn="r">
+              <a:lnSpc>
+                <a:spcPct val="120000"/>
+              </a:lnSpc>
+            </a:pPr>
+            <a:r>
+              <a:rPr sz="1100" b="0" i="0">
+                <a:solidFill>
+                  <a:srgbClr val="E8ECEF"/>
+                </a:solidFill>
+                <a:latin typeface="Consolas"/>
+              </a:rPr>
+              <a:t>CODE  github.com/krish2105/Deep-Learning-</a:t>
+            </a:r>
+          </a:p>
+        </p:txBody>
+      </p:sp>
+      <p:sp>
+        <p:nvSpPr>
+          <p:cNvPr id="13" name="TextBox 12"/>
           <p:cNvSpPr txBox="1"/>
           <p:nvPr/>
         </p:nvSpPr>
@@ -9107,7 +9162,7 @@
         </p:nvSpPr>
         <p:spPr>
           <a:xfrm>
-            <a:off x="640080" y="4572000"/>
+            <a:off x="640080" y="4526280"/>
             <a:ext cx="2743200" cy="25400"/>
           </a:xfrm>
           <a:prstGeom prst="rect">
@@ -9145,13 +9200,116 @@
       </p:sp>
       <p:sp>
         <p:nvSpPr>
-          <p:cNvPr id="8" name="TextBox 7"/>
-          <p:cNvSpPr txBox="1"/>
-          <p:nvPr/>
-        </p:nvSpPr>
-        <p:spPr>
-          <a:xfrm>
-            <a:off x="640080" y="4846320"/>
+          <p:cNvPr id="8" name="Rounded Rectangle 7"/>
+          <p:cNvSpPr/>
+          <p:nvPr/>
+        </p:nvSpPr>
+        <p:spPr>
+          <a:xfrm>
+            <a:off x="640080" y="4754880"/>
+            <a:ext cx="10881360" cy="914400"/>
+          </a:xfrm>
+          <a:prstGeom prst="roundRect">
+            <a:avLst>
+              <a:gd name="adj" fmla="val 3000"/>
+            </a:avLst>
+          </a:prstGeom>
+          <a:solidFill>
+            <a:srgbClr val="16191B"/>
+          </a:solidFill>
+          <a:ln w="9525">
+            <a:solidFill>
+              <a:srgbClr val="2A2F33"/>
+            </a:solidFill>
+          </a:ln>
+          <a:effectLst/>
+        </p:spPr>
+        <p:style>
+          <a:lnRef idx="1">
+            <a:schemeClr val="accent1"/>
+          </a:lnRef>
+          <a:fillRef idx="3">
+            <a:schemeClr val="accent1"/>
+          </a:fillRef>
+          <a:effectRef idx="2">
+            <a:schemeClr val="accent1"/>
+          </a:effectRef>
+          <a:fontRef idx="minor">
+            <a:schemeClr val="lt1"/>
+          </a:fontRef>
+        </p:style>
+        <p:txBody>
+          <a:bodyPr rtlCol="0" anchor="ctr"/>
+          <a:lstStyle/>
+          <a:p>
+            <a:pPr algn="ctr"/>
+          </a:p>
+        </p:txBody>
+      </p:sp>
+      <p:sp>
+        <p:nvSpPr>
+          <p:cNvPr id="9" name="TextBox 8"/>
+          <p:cNvSpPr txBox="1"/>
+          <p:nvPr/>
+        </p:nvSpPr>
+        <p:spPr>
+          <a:xfrm>
+            <a:off x="914400" y="4901184"/>
+            <a:ext cx="10332720" cy="640080"/>
+          </a:xfrm>
+          <a:prstGeom prst="rect">
+            <a:avLst/>
+          </a:prstGeom>
+          <a:noFill/>
+        </p:spPr>
+        <p:txBody>
+          <a:bodyPr wrap="square" anchor="t">
+            <a:spAutoFit/>
+          </a:bodyPr>
+          <a:lstStyle/>
+          <a:p>
+            <a:pPr algn="l">
+              <a:lnSpc>
+                <a:spcPct val="125000"/>
+              </a:lnSpc>
+            </a:pPr>
+            <a:r>
+              <a:rPr sz="1300" b="0" i="0">
+                <a:solidFill>
+                  <a:srgbClr val="E8ECEF"/>
+                </a:solidFill>
+                <a:latin typeface="Consolas"/>
+              </a:rPr>
+              <a:t>TRY IT   sentinel-cxr.vercel.app  —  console → “Explore the demo”, no sign-up</a:t>
+            </a:r>
+          </a:p>
+          <a:p>
+            <a:pPr algn="l">
+              <a:lnSpc>
+                <a:spcPct val="125000"/>
+              </a:lnSpc>
+            </a:pPr>
+            <a:r>
+              <a:rPr sz="1300" b="0" i="0">
+                <a:solidFill>
+                  <a:srgbClr val="E8ECEF"/>
+                </a:solidFill>
+                <a:latin typeface="Consolas"/>
+              </a:rPr>
+              <a:t>CODE     github.com/krish2105/Deep-Learning-</a:t>
+            </a:r>
+          </a:p>
+        </p:txBody>
+      </p:sp>
+      <p:sp>
+        <p:nvSpPr>
+          <p:cNvPr id="10" name="TextBox 9"/>
+          <p:cNvSpPr txBox="1"/>
+          <p:nvPr/>
+        </p:nvSpPr>
+        <p:spPr>
+          <a:xfrm>
+            <a:off x="640080" y="5806440"/>
             <a:ext cx="10881360" cy="365760"/>
           </a:xfrm>
           <a:prstGeom prst="rect">
@@ -9171,49 +9329,10 @@
               </a:lnSpc>
             </a:pPr>
             <a:r>
-              <a:rPr sz="1400" b="0" i="0">
+              <a:rPr sz="1100" b="0" i="0">
                 <a:solidFill>
                   <a:srgbClr val="8A9299"/>
                 </a:solidFill>
-                <a:latin typeface="Consolas"/>
-              </a:rPr>
-              <a:t>github.com/krish2105/Deep-Learning-</a:t>
-            </a:r>
-          </a:p>
-        </p:txBody>
-      </p:sp>
-      <p:sp>
-        <p:nvSpPr>
-          <p:cNvPr id="9" name="TextBox 8"/>
-          <p:cNvSpPr txBox="1"/>
-          <p:nvPr/>
-        </p:nvSpPr>
-        <p:spPr>
-          <a:xfrm>
-            <a:off x="640080" y="5349240"/>
-            <a:ext cx="10881360" cy="365760"/>
-          </a:xfrm>
-          <a:prstGeom prst="rect">
-            <a:avLst/>
-          </a:prstGeom>
-          <a:noFill/>
-        </p:spPr>
-        <p:txBody>
-          <a:bodyPr wrap="square" anchor="t">
-            <a:spAutoFit/>
-          </a:bodyPr>
-          <a:lstStyle/>
-          <a:p>
-            <a:pPr algn="l">
-              <a:lnSpc>
-                <a:spcPct val="100000"/>
-              </a:lnSpc>
-            </a:pPr>
-            <a:r>
-              <a:rPr sz="1200" b="0" i="0">
-                <a:solidFill>
-                  <a:srgbClr val="8A9299"/>
-                </a:solidFill>
                 <a:latin typeface="Calibri"/>
               </a:rPr>
               <a:t>Krishna Mathur AS25DXB018 · Atharva Soundankar AS25DXB020 · Yash Petkar AS25DXB021</a:t>
@@ -9223,7 +9342,7 @@
       </p:sp>
       <p:sp>
         <p:nvSpPr>
-          <p:cNvPr id="10" name="TextBox 9"/>
+          <p:cNvPr id="11" name="TextBox 10"/>
           <p:cNvSpPr txBox="1"/>
           <p:nvPr/>
         </p:nvSpPr>
